--- a/docs/Project_Details_Guga_Notes_for_Team.pptx
+++ b/docs/Project_Details_Guga_Notes_for_Team.pptx
@@ -142,9 +142,38 @@
 <file path=ppt/revisionInfo.xml><?xml version="1.0" encoding="utf-8"?>
 <p1510:revInfo xmlns:a="http://schemas.openxmlformats.org/drawingml/2006/main" xmlns:r="http://schemas.openxmlformats.org/officeDocument/2006/relationships" xmlns:p1510="http://schemas.microsoft.com/office/powerpoint/2015/10/main">
   <p1510:revLst>
-    <p1510:client id="{1FE7D28F-1EE4-48C2-B78D-09CA04DEA496}" v="108" dt="2026-03-11T11:48:25.848"/>
+    <p1510:client id="{21463F7C-68F5-4E20-B074-F984E09B43B0}" v="1" dt="2026-03-15T12:40:29.163"/>
   </p1510:revLst>
 </p1510:revInfo>
+</file>
+
+<file path=ppt/changesInfos/changesInfo1.xml><?xml version="1.0" encoding="utf-8"?>
+<pc:chgInfo xmlns:a="http://schemas.openxmlformats.org/drawingml/2006/main" xmlns:r="http://schemas.openxmlformats.org/officeDocument/2006/relationships" xmlns:ac="http://schemas.microsoft.com/office/drawing/2013/main/command" xmlns:pc="http://schemas.microsoft.com/office/powerpoint/2013/main/command">
+  <pc:docChgLst>
+    <pc:chgData name="Guga Gugaratshan" userId="6cfda388-3fe9-4533-b511-2731e2a73b97" providerId="ADAL" clId="{F8C8443B-B8E5-4B25-9153-A630379CD1C7}"/>
+    <pc:docChg chg="modSld">
+      <pc:chgData name="Guga Gugaratshan" userId="6cfda388-3fe9-4533-b511-2731e2a73b97" providerId="ADAL" clId="{F8C8443B-B8E5-4B25-9153-A630379CD1C7}" dt="2026-03-15T12:40:29.163" v="0"/>
+      <pc:docMkLst>
+        <pc:docMk/>
+      </pc:docMkLst>
+      <pc:sldChg chg="addSp modSp">
+        <pc:chgData name="Guga Gugaratshan" userId="6cfda388-3fe9-4533-b511-2731e2a73b97" providerId="ADAL" clId="{F8C8443B-B8E5-4B25-9153-A630379CD1C7}" dt="2026-03-15T12:40:29.163" v="0"/>
+        <pc:sldMkLst>
+          <pc:docMk/>
+          <pc:sldMk cId="3458134608" sldId="337"/>
+        </pc:sldMkLst>
+        <pc:picChg chg="add mod">
+          <ac:chgData name="Guga Gugaratshan" userId="6cfda388-3fe9-4533-b511-2731e2a73b97" providerId="ADAL" clId="{F8C8443B-B8E5-4B25-9153-A630379CD1C7}" dt="2026-03-15T12:40:29.163" v="0"/>
+          <ac:picMkLst>
+            <pc:docMk/>
+            <pc:sldMk cId="3458134608" sldId="337"/>
+            <ac:picMk id="3" creationId="{0A11F2CA-3DA9-0DB2-2926-A5F37E18DF4E}"/>
+          </ac:picMkLst>
+        </pc:picChg>
+      </pc:sldChg>
+    </pc:docChg>
+  </pc:docChgLst>
+</pc:chgInfo>
 </file>
 
 <file path=ppt/diagrams/colors1.xml><?xml version="1.0" encoding="utf-8"?>
@@ -5609,7 +5638,7 @@
           <a:p>
             <a:fld id="{66429E72-81D2-F543-98F3-BA19AAC7B76D}" type="datetimeFigureOut">
               <a:rPr lang="en-US" smtClean="0"/>
-              <a:t>3/11/2026</a:t>
+              <a:t>3/15/2026</a:t>
             </a:fld>
             <a:endParaRPr lang="en-US"/>
           </a:p>
@@ -14033,6 +14062,44 @@
           </a:p>
         </p:txBody>
       </p:sp>
+      <p:pic>
+        <p:nvPicPr>
+          <p:cNvPr id="3" name="Picture 2">
+            <a:extLst>
+              <a:ext uri="{FF2B5EF4-FFF2-40B4-BE49-F238E27FC236}">
+                <a16:creationId xmlns:a16="http://schemas.microsoft.com/office/drawing/2014/main" id="{0A11F2CA-3DA9-0DB2-2926-A5F37E18DF4E}"/>
+              </a:ext>
+            </a:extLst>
+          </p:cNvPr>
+          <p:cNvPicPr>
+            <a:picLocks noChangeAspect="1"/>
+          </p:cNvPicPr>
+          <p:nvPr/>
+        </p:nvPicPr>
+        <p:blipFill>
+          <a:blip r:embed="rId2" cstate="print">
+            <a:extLst>
+              <a:ext uri="{28A0092B-C50C-407E-A947-70E740481C1C}">
+                <a14:useLocalDpi xmlns:a14="http://schemas.microsoft.com/office/drawing/2010/main" val="0"/>
+              </a:ext>
+            </a:extLst>
+          </a:blip>
+          <a:srcRect/>
+          <a:stretch>
+            <a:fillRect/>
+          </a:stretch>
+        </p:blipFill>
+        <p:spPr bwMode="auto">
+          <a:xfrm>
+            <a:off x="1985136" y="163956"/>
+            <a:ext cx="8027543" cy="6280271"/>
+          </a:xfrm>
+          <a:prstGeom prst="rect">
+            <a:avLst/>
+          </a:prstGeom>
+          <a:noFill/>
+        </p:spPr>
+      </p:pic>
     </p:spTree>
     <p:extLst>
       <p:ext uri="{BB962C8B-B14F-4D97-AF65-F5344CB8AC3E}">
